--- a/自学/マーケティング基礎/04_価値をどのように提供するのか.pptx
+++ b/自学/マーケティング基礎/04_価値をどのように提供するのか.pptx
@@ -1896,6 +1896,12 @@
               <a:rPr lang="ja-JP" altLang="en-US" sz="1200" dirty="0"/>
               <a:t>供給を引き受けなければ、当該枠を競合メーカーに取られる可能性がある。カテゴリ内シェアを防衛する観点での意義もある。</a:t>
             </a:r>
+            <a:endParaRPr lang="en-US" altLang="ja-JP" sz="1200" dirty="0"/>
+          </a:p>
+          <a:p>
+            <a:pPr marL="0" indent="0">
+              <a:buNone/>
+            </a:pPr>
             <a:endParaRPr lang="en-US" altLang="ja-JP" sz="1200" dirty="0"/>
           </a:p>
           <a:p>
